--- a/Session7/Testing_tools.pptx
+++ b/Session7/Testing_tools.pptx
@@ -1228,6 +1228,13 @@
         </dgm:presLayoutVars>
       </dgm:prSet>
       <dgm:spPr/>
+      <dgm:t>
+        <a:bodyPr/>
+        <a:lstStyle/>
+        <a:p>
+          <a:endParaRPr lang="en-IN"/>
+        </a:p>
+      </dgm:t>
     </dgm:pt>
     <dgm:pt modelId="{5DC1B5FF-D800-4EE8-90F0-725A33FC81B7}" type="pres">
       <dgm:prSet presAssocID="{26F10292-637B-405C-8CEF-17D659796E5F}" presName="compNode" presStyleCnt="0"/>
@@ -1244,10 +1251,24 @@
         </dgm:presLayoutVars>
       </dgm:prSet>
       <dgm:spPr/>
+      <dgm:t>
+        <a:bodyPr/>
+        <a:lstStyle/>
+        <a:p>
+          <a:endParaRPr lang="en-IN"/>
+        </a:p>
+      </dgm:t>
     </dgm:pt>
     <dgm:pt modelId="{3B7FBC8B-6B1A-4502-942C-EFA4F705F65E}" type="pres">
       <dgm:prSet presAssocID="{26F10292-637B-405C-8CEF-17D659796E5F}" presName="childTextHidden" presStyleLbl="bgAccFollowNode1" presStyleIdx="0" presStyleCnt="4"/>
       <dgm:spPr/>
+      <dgm:t>
+        <a:bodyPr/>
+        <a:lstStyle/>
+        <a:p>
+          <a:endParaRPr lang="en-IN"/>
+        </a:p>
+      </dgm:t>
     </dgm:pt>
     <dgm:pt modelId="{848053AC-7F99-4456-96B9-2BE5C135142C}" type="pres">
       <dgm:prSet presAssocID="{26F10292-637B-405C-8CEF-17D659796E5F}" presName="parentText" presStyleLbl="node1" presStyleIdx="0" presStyleCnt="4" custScaleX="159771" custScaleY="133257">
@@ -1257,6 +1278,13 @@
         </dgm:presLayoutVars>
       </dgm:prSet>
       <dgm:spPr/>
+      <dgm:t>
+        <a:bodyPr/>
+        <a:lstStyle/>
+        <a:p>
+          <a:endParaRPr lang="en-IN"/>
+        </a:p>
+      </dgm:t>
     </dgm:pt>
     <dgm:pt modelId="{7117553C-19D3-411F-BA71-8837C4AE6B2C}" type="pres">
       <dgm:prSet presAssocID="{26F10292-637B-405C-8CEF-17D659796E5F}" presName="aSpace" presStyleCnt="0"/>
@@ -1304,6 +1332,13 @@
         </dgm:presLayoutVars>
       </dgm:prSet>
       <dgm:spPr/>
+      <dgm:t>
+        <a:bodyPr/>
+        <a:lstStyle/>
+        <a:p>
+          <a:endParaRPr lang="en-IN"/>
+        </a:p>
+      </dgm:t>
     </dgm:pt>
     <dgm:pt modelId="{8449980B-53DE-4295-A060-934F04B8E7F9}" type="pres">
       <dgm:prSet presAssocID="{5D2C3C3D-EFA3-453D-9EA7-C889D478177C}" presName="aSpace" presStyleCnt="0"/>
@@ -1324,10 +1359,24 @@
         </dgm:presLayoutVars>
       </dgm:prSet>
       <dgm:spPr/>
+      <dgm:t>
+        <a:bodyPr/>
+        <a:lstStyle/>
+        <a:p>
+          <a:endParaRPr lang="en-IN"/>
+        </a:p>
+      </dgm:t>
     </dgm:pt>
     <dgm:pt modelId="{5EB1DBBE-0813-4288-841A-9D3064F48CB4}" type="pres">
       <dgm:prSet presAssocID="{EF833784-1B50-455E-979B-4DBD3249F8E4}" presName="childTextHidden" presStyleLbl="bgAccFollowNode1" presStyleIdx="2" presStyleCnt="4"/>
       <dgm:spPr/>
+      <dgm:t>
+        <a:bodyPr/>
+        <a:lstStyle/>
+        <a:p>
+          <a:endParaRPr lang="en-IN"/>
+        </a:p>
+      </dgm:t>
     </dgm:pt>
     <dgm:pt modelId="{B14A2E04-DA6D-4A70-B8AD-73C072476437}" type="pres">
       <dgm:prSet presAssocID="{EF833784-1B50-455E-979B-4DBD3249F8E4}" presName="parentText" presStyleLbl="node1" presStyleIdx="2" presStyleCnt="4">
@@ -1337,6 +1386,13 @@
         </dgm:presLayoutVars>
       </dgm:prSet>
       <dgm:spPr/>
+      <dgm:t>
+        <a:bodyPr/>
+        <a:lstStyle/>
+        <a:p>
+          <a:endParaRPr lang="en-IN"/>
+        </a:p>
+      </dgm:t>
     </dgm:pt>
     <dgm:pt modelId="{8785904E-8243-4DB6-AE77-910235F0DD02}" type="pres">
       <dgm:prSet presAssocID="{EF833784-1B50-455E-979B-4DBD3249F8E4}" presName="aSpace" presStyleCnt="0"/>
@@ -1357,10 +1413,24 @@
         </dgm:presLayoutVars>
       </dgm:prSet>
       <dgm:spPr/>
+      <dgm:t>
+        <a:bodyPr/>
+        <a:lstStyle/>
+        <a:p>
+          <a:endParaRPr lang="en-IN"/>
+        </a:p>
+      </dgm:t>
     </dgm:pt>
     <dgm:pt modelId="{64AB0AD2-5BF1-4B4E-A098-94D829393410}" type="pres">
       <dgm:prSet presAssocID="{5F236C10-E636-4EC5-80D3-5AEF81357040}" presName="childTextHidden" presStyleLbl="bgAccFollowNode1" presStyleIdx="3" presStyleCnt="4"/>
       <dgm:spPr/>
+      <dgm:t>
+        <a:bodyPr/>
+        <a:lstStyle/>
+        <a:p>
+          <a:endParaRPr lang="en-IN"/>
+        </a:p>
+      </dgm:t>
     </dgm:pt>
     <dgm:pt modelId="{A307E9BA-A484-4281-AA5E-14A72352ADB9}" type="pres">
       <dgm:prSet presAssocID="{5F236C10-E636-4EC5-80D3-5AEF81357040}" presName="parentText" presStyleLbl="node1" presStyleIdx="3" presStyleCnt="4">
@@ -1370,6 +1440,13 @@
         </dgm:presLayoutVars>
       </dgm:prSet>
       <dgm:spPr/>
+      <dgm:t>
+        <a:bodyPr/>
+        <a:lstStyle/>
+        <a:p>
+          <a:endParaRPr lang="en-IN"/>
+        </a:p>
+      </dgm:t>
     </dgm:pt>
   </dgm:ptLst>
   <dgm:cxnLst>
@@ -3574,7 +3651,7 @@
           <a:p>
             <a:fld id="{51CAB068-2450-4597-9EF5-5AF7E6E959B5}" type="datetimeFigureOut">
               <a:rPr lang="en-IN" smtClean="0"/>
-              <a:t>29-08-2026</a:t>
+              <a:t>05-09-2026</a:t>
             </a:fld>
             <a:endParaRPr lang="en-IN"/>
           </a:p>
@@ -3744,7 +3821,7 @@
           <a:p>
             <a:fld id="{51CAB068-2450-4597-9EF5-5AF7E6E959B5}" type="datetimeFigureOut">
               <a:rPr lang="en-IN" smtClean="0"/>
-              <a:t>29-08-2026</a:t>
+              <a:t>05-09-2026</a:t>
             </a:fld>
             <a:endParaRPr lang="en-IN"/>
           </a:p>
@@ -3924,7 +4001,7 @@
           <a:p>
             <a:fld id="{51CAB068-2450-4597-9EF5-5AF7E6E959B5}" type="datetimeFigureOut">
               <a:rPr lang="en-IN" smtClean="0"/>
-              <a:t>29-08-2026</a:t>
+              <a:t>05-09-2026</a:t>
             </a:fld>
             <a:endParaRPr lang="en-IN"/>
           </a:p>
@@ -4094,7 +4171,7 @@
           <a:p>
             <a:fld id="{51CAB068-2450-4597-9EF5-5AF7E6E959B5}" type="datetimeFigureOut">
               <a:rPr lang="en-IN" smtClean="0"/>
-              <a:t>29-08-2026</a:t>
+              <a:t>05-09-2026</a:t>
             </a:fld>
             <a:endParaRPr lang="en-IN"/>
           </a:p>
@@ -4340,7 +4417,7 @@
           <a:p>
             <a:fld id="{51CAB068-2450-4597-9EF5-5AF7E6E959B5}" type="datetimeFigureOut">
               <a:rPr lang="en-IN" smtClean="0"/>
-              <a:t>29-08-2026</a:t>
+              <a:t>05-09-2026</a:t>
             </a:fld>
             <a:endParaRPr lang="en-IN"/>
           </a:p>
@@ -4572,7 +4649,7 @@
           <a:p>
             <a:fld id="{51CAB068-2450-4597-9EF5-5AF7E6E959B5}" type="datetimeFigureOut">
               <a:rPr lang="en-IN" smtClean="0"/>
-              <a:t>29-08-2026</a:t>
+              <a:t>05-09-2026</a:t>
             </a:fld>
             <a:endParaRPr lang="en-IN"/>
           </a:p>
@@ -4939,7 +5016,7 @@
           <a:p>
             <a:fld id="{51CAB068-2450-4597-9EF5-5AF7E6E959B5}" type="datetimeFigureOut">
               <a:rPr lang="en-IN" smtClean="0"/>
-              <a:t>29-08-2026</a:t>
+              <a:t>05-09-2026</a:t>
             </a:fld>
             <a:endParaRPr lang="en-IN"/>
           </a:p>
@@ -5057,7 +5134,7 @@
           <a:p>
             <a:fld id="{51CAB068-2450-4597-9EF5-5AF7E6E959B5}" type="datetimeFigureOut">
               <a:rPr lang="en-IN" smtClean="0"/>
-              <a:t>29-08-2026</a:t>
+              <a:t>05-09-2026</a:t>
             </a:fld>
             <a:endParaRPr lang="en-IN"/>
           </a:p>
@@ -5152,7 +5229,7 @@
           <a:p>
             <a:fld id="{51CAB068-2450-4597-9EF5-5AF7E6E959B5}" type="datetimeFigureOut">
               <a:rPr lang="en-IN" smtClean="0"/>
-              <a:t>29-08-2026</a:t>
+              <a:t>05-09-2026</a:t>
             </a:fld>
             <a:endParaRPr lang="en-IN"/>
           </a:p>
@@ -5429,7 +5506,7 @@
           <a:p>
             <a:fld id="{51CAB068-2450-4597-9EF5-5AF7E6E959B5}" type="datetimeFigureOut">
               <a:rPr lang="en-IN" smtClean="0"/>
-              <a:t>29-08-2026</a:t>
+              <a:t>05-09-2026</a:t>
             </a:fld>
             <a:endParaRPr lang="en-IN"/>
           </a:p>
@@ -5682,7 +5759,7 @@
           <a:p>
             <a:fld id="{51CAB068-2450-4597-9EF5-5AF7E6E959B5}" type="datetimeFigureOut">
               <a:rPr lang="en-IN" smtClean="0"/>
-              <a:t>29-08-2026</a:t>
+              <a:t>05-09-2026</a:t>
             </a:fld>
             <a:endParaRPr lang="en-IN"/>
           </a:p>
@@ -5895,7 +5972,7 @@
           <a:p>
             <a:fld id="{51CAB068-2450-4597-9EF5-5AF7E6E959B5}" type="datetimeFigureOut">
               <a:rPr lang="en-IN" smtClean="0"/>
-              <a:t>29-08-2026</a:t>
+              <a:t>05-09-2026</a:t>
             </a:fld>
             <a:endParaRPr lang="en-IN"/>
           </a:p>
@@ -6885,10 +6962,10 @@
           <a:lstStyle/>
           <a:p>
             <a:r>
-              <a:rPr lang="en-US" dirty="0" smtClean="0"/>
+              <a:rPr lang="en-US" b="1" dirty="0" smtClean="0"/>
               <a:t>Test cases</a:t>
             </a:r>
-            <a:endParaRPr lang="en-IN" dirty="0"/>
+            <a:endParaRPr lang="en-IN" b="1" dirty="0"/>
           </a:p>
         </p:txBody>
       </p:sp>
